--- a/pptx-asset-library/decks/01_tables/TBL_bulk_striped_v2.pptx
+++ b/pptx-asset-library/decks/01_tables/TBL_bulk_striped_v2.pptx
@@ -3201,7 +3201,7 @@
           <a:graphicData uri="http://schemas.openxmlformats.org/drawingml/2006/table">
             <a:tbl>
               <a:tblPr>
-                <a:tableStyleId>{2D5ABB26-0587-4C30-8999-92F81FD0307C}</a:tableStyleId>
+                <a:tableStyleId>{5C22544A-7EE6-4342-B048-85BDC9FD1C3A}</a:tableStyleId>
               </a:tblPr>
               <a:tblGrid>
                 <a:gridCol w="2377440"/>
@@ -4042,7 +4042,7 @@
           <a:graphicData uri="http://schemas.openxmlformats.org/drawingml/2006/table">
             <a:tbl>
               <a:tblPr>
-                <a:tableStyleId>{2D5ABB26-0587-4C30-8999-92F81FD0307C}</a:tableStyleId>
+                <a:tableStyleId>{5C22544A-7EE6-4342-B048-85BDC9FD1C3A}</a:tableStyleId>
               </a:tblPr>
               <a:tblGrid>
                 <a:gridCol w="2377440"/>
@@ -5157,7 +5157,7 @@
           <a:graphicData uri="http://schemas.openxmlformats.org/drawingml/2006/table">
             <a:tbl>
               <a:tblPr>
-                <a:tableStyleId>{2D5ABB26-0587-4C30-8999-92F81FD0307C}</a:tableStyleId>
+                <a:tableStyleId>{5C22544A-7EE6-4342-B048-85BDC9FD1C3A}</a:tableStyleId>
               </a:tblPr>
               <a:tblGrid>
                 <a:gridCol w="2377440"/>
@@ -6224,7 +6224,7 @@
           <a:graphicData uri="http://schemas.openxmlformats.org/drawingml/2006/table">
             <a:tbl>
               <a:tblPr>
-                <a:tableStyleId>{2D5ABB26-0587-4C30-8999-92F81FD0307C}</a:tableStyleId>
+                <a:tableStyleId>{5C22544A-7EE6-4342-B048-85BDC9FD1C3A}</a:tableStyleId>
               </a:tblPr>
               <a:tblGrid>
                 <a:gridCol w="2377440"/>
@@ -7655,7 +7655,7 @@
           <a:graphicData uri="http://schemas.openxmlformats.org/drawingml/2006/table">
             <a:tbl>
               <a:tblPr>
-                <a:tableStyleId>{2D5ABB26-0587-4C30-8999-92F81FD0307C}</a:tableStyleId>
+                <a:tableStyleId>{5C22544A-7EE6-4342-B048-85BDC9FD1C3A}</a:tableStyleId>
               </a:tblPr>
               <a:tblGrid>
                 <a:gridCol w="2011680"/>
@@ -8948,7 +8948,7 @@
           <a:graphicData uri="http://schemas.openxmlformats.org/drawingml/2006/table">
             <a:tbl>
               <a:tblPr>
-                <a:tableStyleId>{2D5ABB26-0587-4C30-8999-92F81FD0307C}</a:tableStyleId>
+                <a:tableStyleId>{5C22544A-7EE6-4342-B048-85BDC9FD1C3A}</a:tableStyleId>
               </a:tblPr>
               <a:tblGrid>
                 <a:gridCol w="2011680"/>
@@ -10695,7 +10695,7 @@
           <a:graphicData uri="http://schemas.openxmlformats.org/drawingml/2006/table">
             <a:tbl>
               <a:tblPr>
-                <a:tableStyleId>{2D5ABB26-0587-4C30-8999-92F81FD0307C}</a:tableStyleId>
+                <a:tableStyleId>{5C22544A-7EE6-4342-B048-85BDC9FD1C3A}</a:tableStyleId>
               </a:tblPr>
               <a:tblGrid>
                 <a:gridCol w="2011680"/>
@@ -12214,7 +12214,7 @@
           <a:graphicData uri="http://schemas.openxmlformats.org/drawingml/2006/table">
             <a:tbl>
               <a:tblPr>
-                <a:tableStyleId>{2D5ABB26-0587-4C30-8999-92F81FD0307C}</a:tableStyleId>
+                <a:tableStyleId>{5C22544A-7EE6-4342-B048-85BDC9FD1C3A}</a:tableStyleId>
               </a:tblPr>
               <a:tblGrid>
                 <a:gridCol w="2011680"/>
@@ -14277,7 +14277,7 @@
           <a:graphicData uri="http://schemas.openxmlformats.org/drawingml/2006/table">
             <a:tbl>
               <a:tblPr>
-                <a:tableStyleId>{2D5ABB26-0587-4C30-8999-92F81FD0307C}</a:tableStyleId>
+                <a:tableStyleId>{5C22544A-7EE6-4342-B048-85BDC9FD1C3A}</a:tableStyleId>
               </a:tblPr>
               <a:tblGrid>
                 <a:gridCol w="2377440"/>
@@ -15118,7 +15118,7 @@
           <a:graphicData uri="http://schemas.openxmlformats.org/drawingml/2006/table">
             <a:tbl>
               <a:tblPr>
-                <a:tableStyleId>{2D5ABB26-0587-4C30-8999-92F81FD0307C}</a:tableStyleId>
+                <a:tableStyleId>{5C22544A-7EE6-4342-B048-85BDC9FD1C3A}</a:tableStyleId>
               </a:tblPr>
               <a:tblGrid>
                 <a:gridCol w="2377440"/>
@@ -16233,7 +16233,7 @@
           <a:graphicData uri="http://schemas.openxmlformats.org/drawingml/2006/table">
             <a:tbl>
               <a:tblPr>
-                <a:tableStyleId>{2D5ABB26-0587-4C30-8999-92F81FD0307C}</a:tableStyleId>
+                <a:tableStyleId>{5C22544A-7EE6-4342-B048-85BDC9FD1C3A}</a:tableStyleId>
               </a:tblPr>
               <a:tblGrid>
                 <a:gridCol w="2377440"/>
@@ -17300,7 +17300,7 @@
           <a:graphicData uri="http://schemas.openxmlformats.org/drawingml/2006/table">
             <a:tbl>
               <a:tblPr>
-                <a:tableStyleId>{2D5ABB26-0587-4C30-8999-92F81FD0307C}</a:tableStyleId>
+                <a:tableStyleId>{5C22544A-7EE6-4342-B048-85BDC9FD1C3A}</a:tableStyleId>
               </a:tblPr>
               <a:tblGrid>
                 <a:gridCol w="2377440"/>
@@ -18415,7 +18415,7 @@
           <a:graphicData uri="http://schemas.openxmlformats.org/drawingml/2006/table">
             <a:tbl>
               <a:tblPr>
-                <a:tableStyleId>{2D5ABB26-0587-4C30-8999-92F81FD0307C}</a:tableStyleId>
+                <a:tableStyleId>{5C22544A-7EE6-4342-B048-85BDC9FD1C3A}</a:tableStyleId>
               </a:tblPr>
               <a:tblGrid>
                 <a:gridCol w="2377440"/>
@@ -19846,7 +19846,7 @@
           <a:graphicData uri="http://schemas.openxmlformats.org/drawingml/2006/table">
             <a:tbl>
               <a:tblPr>
-                <a:tableStyleId>{2D5ABB26-0587-4C30-8999-92F81FD0307C}</a:tableStyleId>
+                <a:tableStyleId>{5C22544A-7EE6-4342-B048-85BDC9FD1C3A}</a:tableStyleId>
               </a:tblPr>
               <a:tblGrid>
                 <a:gridCol w="2011680"/>
@@ -21139,7 +21139,7 @@
           <a:graphicData uri="http://schemas.openxmlformats.org/drawingml/2006/table">
             <a:tbl>
               <a:tblPr>
-                <a:tableStyleId>{2D5ABB26-0587-4C30-8999-92F81FD0307C}</a:tableStyleId>
+                <a:tableStyleId>{5C22544A-7EE6-4342-B048-85BDC9FD1C3A}</a:tableStyleId>
               </a:tblPr>
               <a:tblGrid>
                 <a:gridCol w="2011680"/>
@@ -22886,7 +22886,7 @@
           <a:graphicData uri="http://schemas.openxmlformats.org/drawingml/2006/table">
             <a:tbl>
               <a:tblPr>
-                <a:tableStyleId>{2D5ABB26-0587-4C30-8999-92F81FD0307C}</a:tableStyleId>
+                <a:tableStyleId>{5C22544A-7EE6-4342-B048-85BDC9FD1C3A}</a:tableStyleId>
               </a:tblPr>
               <a:tblGrid>
                 <a:gridCol w="2011680"/>
@@ -24405,7 +24405,7 @@
           <a:graphicData uri="http://schemas.openxmlformats.org/drawingml/2006/table">
             <a:tbl>
               <a:tblPr>
-                <a:tableStyleId>{2D5ABB26-0587-4C30-8999-92F81FD0307C}</a:tableStyleId>
+                <a:tableStyleId>{5C22544A-7EE6-4342-B048-85BDC9FD1C3A}</a:tableStyleId>
               </a:tblPr>
               <a:tblGrid>
                 <a:gridCol w="2011680"/>
@@ -26468,7 +26468,7 @@
           <a:graphicData uri="http://schemas.openxmlformats.org/drawingml/2006/table">
             <a:tbl>
               <a:tblPr>
-                <a:tableStyleId>{2D5ABB26-0587-4C30-8999-92F81FD0307C}</a:tableStyleId>
+                <a:tableStyleId>{5C22544A-7EE6-4342-B048-85BDC9FD1C3A}</a:tableStyleId>
               </a:tblPr>
               <a:tblGrid>
                 <a:gridCol w="2377440"/>
@@ -27535,7 +27535,7 @@
           <a:graphicData uri="http://schemas.openxmlformats.org/drawingml/2006/table">
             <a:tbl>
               <a:tblPr>
-                <a:tableStyleId>{2D5ABB26-0587-4C30-8999-92F81FD0307C}</a:tableStyleId>
+                <a:tableStyleId>{5C22544A-7EE6-4342-B048-85BDC9FD1C3A}</a:tableStyleId>
               </a:tblPr>
               <a:tblGrid>
                 <a:gridCol w="2377440"/>
@@ -28966,7 +28966,7 @@
           <a:graphicData uri="http://schemas.openxmlformats.org/drawingml/2006/table">
             <a:tbl>
               <a:tblPr>
-                <a:tableStyleId>{2D5ABB26-0587-4C30-8999-92F81FD0307C}</a:tableStyleId>
+                <a:tableStyleId>{5C22544A-7EE6-4342-B048-85BDC9FD1C3A}</a:tableStyleId>
               </a:tblPr>
               <a:tblGrid>
                 <a:gridCol w="2011680"/>
@@ -30259,7 +30259,7 @@
           <a:graphicData uri="http://schemas.openxmlformats.org/drawingml/2006/table">
             <a:tbl>
               <a:tblPr>
-                <a:tableStyleId>{2D5ABB26-0587-4C30-8999-92F81FD0307C}</a:tableStyleId>
+                <a:tableStyleId>{5C22544A-7EE6-4342-B048-85BDC9FD1C3A}</a:tableStyleId>
               </a:tblPr>
               <a:tblGrid>
                 <a:gridCol w="2011680"/>
@@ -32006,7 +32006,7 @@
           <a:graphicData uri="http://schemas.openxmlformats.org/drawingml/2006/table">
             <a:tbl>
               <a:tblPr>
-                <a:tableStyleId>{2D5ABB26-0587-4C30-8999-92F81FD0307C}</a:tableStyleId>
+                <a:tableStyleId>{5C22544A-7EE6-4342-B048-85BDC9FD1C3A}</a:tableStyleId>
               </a:tblPr>
               <a:tblGrid>
                 <a:gridCol w="2011680"/>
@@ -33525,7 +33525,7 @@
           <a:graphicData uri="http://schemas.openxmlformats.org/drawingml/2006/table">
             <a:tbl>
               <a:tblPr>
-                <a:tableStyleId>{2D5ABB26-0587-4C30-8999-92F81FD0307C}</a:tableStyleId>
+                <a:tableStyleId>{5C22544A-7EE6-4342-B048-85BDC9FD1C3A}</a:tableStyleId>
               </a:tblPr>
               <a:tblGrid>
                 <a:gridCol w="2011680"/>
@@ -35588,7 +35588,7 @@
           <a:graphicData uri="http://schemas.openxmlformats.org/drawingml/2006/table">
             <a:tbl>
               <a:tblPr>
-                <a:tableStyleId>{2D5ABB26-0587-4C30-8999-92F81FD0307C}</a:tableStyleId>
+                <a:tableStyleId>{5C22544A-7EE6-4342-B048-85BDC9FD1C3A}</a:tableStyleId>
               </a:tblPr>
               <a:tblGrid>
                 <a:gridCol w="2377440"/>
